--- a/presentation/output/Bitrix24_klientskie_proekty_Mobile_9x16.pptx
+++ b/presentation/output/Bitrix24_klientskie_proekty_Mobile_9x16.pptx
@@ -4809,7 +4809,7 @@
             <a:solidFill>
               <a:srgbClr val="0066A1"/>
             </a:solidFill>
-            <a:headEnd type="triangle" w="med" len="med"/>
+            <a:tailEnd type="triangle" w="med" len="med"/>
           </a:ln>
         </p:spPr>
         <p:style>
@@ -5730,7 +5730,7 @@
                 </a:solidFill>
                 <a:latin typeface="Montserrat"/>
               </a:rPr>
-              <a:t>Пишите мне в VK</a:t>
+              <a:t>Пишите мне в ВК</a:t>
             </a:r>
           </a:p>
         </p:txBody>

--- a/presentation/output/Bitrix24_klientskie_proekty_Mobile_9x16.pptx
+++ b/presentation/output/Bitrix24_klientskie_proekty_Mobile_9x16.pptx
@@ -3149,8 +3149,8 @@
         </p:nvSpPr>
         <p:spPr>
           <a:xfrm>
-            <a:off x="3177540" y="-868680"/>
-            <a:ext cx="2743200" cy="2743200"/>
+            <a:off x="3817620" y="8001000"/>
+            <a:ext cx="1920240" cy="1920240"/>
           </a:xfrm>
           <a:prstGeom prst="ellipse">
             <a:avLst/>
@@ -3227,45 +3227,30 @@
           </a:p>
         </p:txBody>
       </p:sp>
-      <p:sp>
-        <p:nvSpPr>
-          <p:cNvPr id="5" name="TextBox 4"/>
-          <p:cNvSpPr txBox="1"/>
+      <p:pic>
+        <p:nvPicPr>
+          <p:cNvPr id="5" name="Picture 4" descr="russkiy-bit-logo.png"/>
+          <p:cNvPicPr>
+            <a:picLocks noChangeAspect="1"/>
+          </p:cNvPicPr>
           <p:nvPr/>
-        </p:nvSpPr>
-        <p:spPr>
-          <a:xfrm>
-            <a:off x="4091939" y="8759952"/>
-            <a:ext cx="685800" cy="164592"/>
+        </p:nvPicPr>
+        <p:blipFill>
+          <a:blip r:embed="rId2"/>
+          <a:stretch>
+            <a:fillRect/>
+          </a:stretch>
+        </p:blipFill>
+        <p:spPr>
+          <a:xfrm>
+            <a:off x="3543300" y="256032"/>
+            <a:ext cx="1234440" cy="298767"/>
           </a:xfrm>
           <a:prstGeom prst="rect">
             <a:avLst/>
           </a:prstGeom>
-          <a:noFill/>
-        </p:spPr>
-        <p:txBody>
-          <a:bodyPr wrap="square" lIns="0" rIns="0" tIns="0" bIns="0" anchor="t">
-            <a:spAutoFit/>
-          </a:bodyPr>
-          <a:lstStyle/>
-          <a:p>
-            <a:pPr algn="r">
-              <a:lnSpc>
-                <a:spcPct val="100000"/>
-              </a:lnSpc>
-            </a:pPr>
-            <a:r>
-              <a:rPr sz="800" b="1">
-                <a:solidFill>
-                  <a:srgbClr val="5A7082"/>
-                </a:solidFill>
-                <a:latin typeface="Open Sans"/>
-              </a:rPr>
-              <a:t>01 / 03</a:t>
-            </a:r>
-          </a:p>
-        </p:txBody>
-      </p:sp>
+        </p:spPr>
+      </p:pic>
       <p:sp>
         <p:nvSpPr>
           <p:cNvPr id="6" name="TextBox 5"/>
@@ -3274,47 +3259,8 @@
         </p:nvSpPr>
         <p:spPr>
           <a:xfrm>
-            <a:off x="384048" y="8759952"/>
-            <a:ext cx="2286000" cy="164592"/>
-          </a:xfrm>
-          <a:prstGeom prst="rect">
-            <a:avLst/>
-          </a:prstGeom>
-          <a:noFill/>
-        </p:spPr>
-        <p:txBody>
-          <a:bodyPr wrap="square" lIns="0" rIns="0" tIns="0" bIns="0" anchor="t">
-            <a:spAutoFit/>
-          </a:bodyPr>
-          <a:lstStyle/>
-          <a:p>
-            <a:pPr algn="l">
-              <a:lnSpc>
-                <a:spcPct val="100000"/>
-              </a:lnSpc>
-            </a:pPr>
-            <a:r>
-              <a:rPr sz="800" b="0">
-                <a:solidFill>
-                  <a:srgbClr val="5A7082"/>
-                </a:solidFill>
-                <a:latin typeface="Open Sans"/>
-              </a:rPr>
-              <a:t>Битрикс24 • клиентские проекты</a:t>
-            </a:r>
-          </a:p>
-        </p:txBody>
-      </p:sp>
-      <p:sp>
-        <p:nvSpPr>
-          <p:cNvPr id="7" name="TextBox 6"/>
-          <p:cNvSpPr txBox="1"/>
-          <p:nvPr/>
-        </p:nvSpPr>
-        <p:spPr>
-          <a:xfrm>
             <a:off x="475488" y="502920"/>
-            <a:ext cx="4192524" cy="1051560"/>
+            <a:ext cx="2884932" cy="1051560"/>
           </a:xfrm>
           <a:prstGeom prst="rect">
             <a:avLst/>
@@ -3333,7 +3279,7 @@
               </a:lnSpc>
             </a:pPr>
             <a:r>
-              <a:rPr sz="2400" b="1">
+              <a:rPr sz="2150" b="1">
                 <a:solidFill>
                   <a:srgbClr val="10293E"/>
                 </a:solidFill>
@@ -3346,14 +3292,51 @@
       </p:sp>
       <p:cxnSp>
         <p:nvCxnSpPr>
+          <p:cNvPr id="7" name="Connector 6"/>
+          <p:cNvCxnSpPr/>
+          <p:nvPr/>
+        </p:nvCxnSpPr>
+        <p:spPr>
+          <a:xfrm>
+            <a:off x="2569464" y="2350008"/>
+            <a:ext cx="0" cy="1472183"/>
+          </a:xfrm>
+          <a:prstGeom prst="line">
+            <a:avLst/>
+          </a:prstGeom>
+          <a:ln w="20320">
+            <a:solidFill>
+              <a:srgbClr val="409EEF"/>
+            </a:solidFill>
+            <a:headEnd type="triangle" w="sm" len="sm"/>
+            <a:tailEnd type="triangle" w="sm" len="sm"/>
+          </a:ln>
+        </p:spPr>
+        <p:style>
+          <a:lnRef idx="2">
+            <a:schemeClr val="accent1"/>
+          </a:lnRef>
+          <a:fillRef idx="0">
+            <a:schemeClr val="accent1"/>
+          </a:fillRef>
+          <a:effectRef idx="1">
+            <a:schemeClr val="accent1"/>
+          </a:effectRef>
+          <a:fontRef idx="minor">
+            <a:schemeClr val="tx1"/>
+          </a:fontRef>
+        </p:style>
+      </p:cxnSp>
+      <p:cxnSp>
+        <p:nvCxnSpPr>
           <p:cNvPr id="8" name="Connector 7"/>
           <p:cNvCxnSpPr/>
           <p:nvPr/>
         </p:nvCxnSpPr>
         <p:spPr>
-          <a:xfrm>
-            <a:off x="2569464" y="2350008"/>
-            <a:ext cx="0" cy="1472183"/>
+          <a:xfrm flipH="1">
+            <a:off x="1069848" y="2944368"/>
+            <a:ext cx="1335024" cy="1197863"/>
           </a:xfrm>
           <a:prstGeom prst="line">
             <a:avLst/>
@@ -3388,9 +3371,9 @@
           <p:nvPr/>
         </p:nvCxnSpPr>
         <p:spPr>
-          <a:xfrm flipH="1">
-            <a:off x="1069848" y="2944368"/>
-            <a:ext cx="1335024" cy="1197863"/>
+          <a:xfrm>
+            <a:off x="2752344" y="2944368"/>
+            <a:ext cx="1316735" cy="1197863"/>
           </a:xfrm>
           <a:prstGeom prst="line">
             <a:avLst/>
@@ -3425,9 +3408,9 @@
           <p:nvPr/>
         </p:nvCxnSpPr>
         <p:spPr>
-          <a:xfrm>
-            <a:off x="2752344" y="2944368"/>
-            <a:ext cx="1316735" cy="1197863"/>
+          <a:xfrm flipH="1" flipV="1">
+            <a:off x="1069848" y="4709159"/>
+            <a:ext cx="1335024" cy="850393"/>
           </a:xfrm>
           <a:prstGeom prst="line">
             <a:avLst/>
@@ -3462,9 +3445,9 @@
           <p:nvPr/>
         </p:nvCxnSpPr>
         <p:spPr>
-          <a:xfrm flipH="1" flipV="1">
-            <a:off x="1069848" y="4709159"/>
-            <a:ext cx="1335024" cy="850393"/>
+          <a:xfrm flipV="1">
+            <a:off x="2752344" y="4709159"/>
+            <a:ext cx="1316735" cy="850393"/>
           </a:xfrm>
           <a:prstGeom prst="line">
             <a:avLst/>
@@ -3492,46 +3475,9 @@
           </a:fontRef>
         </p:style>
       </p:cxnSp>
-      <p:cxnSp>
-        <p:nvCxnSpPr>
-          <p:cNvPr id="12" name="Connector 11"/>
-          <p:cNvCxnSpPr/>
-          <p:nvPr/>
-        </p:nvCxnSpPr>
-        <p:spPr>
-          <a:xfrm flipV="1">
-            <a:off x="2752344" y="4709159"/>
-            <a:ext cx="1316735" cy="850393"/>
-          </a:xfrm>
-          <a:prstGeom prst="line">
-            <a:avLst/>
-          </a:prstGeom>
-          <a:ln w="20320">
-            <a:solidFill>
-              <a:srgbClr val="409EEF"/>
-            </a:solidFill>
-            <a:headEnd type="triangle" w="sm" len="sm"/>
-            <a:tailEnd type="triangle" w="sm" len="sm"/>
-          </a:ln>
-        </p:spPr>
-        <p:style>
-          <a:lnRef idx="2">
-            <a:schemeClr val="accent1"/>
-          </a:lnRef>
-          <a:fillRef idx="0">
-            <a:schemeClr val="accent1"/>
-          </a:fillRef>
-          <a:effectRef idx="1">
-            <a:schemeClr val="accent1"/>
-          </a:effectRef>
-          <a:fontRef idx="minor">
-            <a:schemeClr val="tx1"/>
-          </a:fontRef>
-        </p:style>
-      </p:cxnSp>
-      <p:sp>
-        <p:nvSpPr>
-          <p:cNvPr id="13" name="Oval 12"/>
+      <p:sp>
+        <p:nvSpPr>
+          <p:cNvPr id="12" name="Oval 11"/>
           <p:cNvSpPr/>
           <p:nvPr/>
         </p:nvSpPr>
@@ -3574,7 +3520,7 @@
       </p:sp>
       <p:sp>
         <p:nvSpPr>
-          <p:cNvPr id="14" name="Rounded Rectangle 13"/>
+          <p:cNvPr id="13" name="Rounded Rectangle 12"/>
           <p:cNvSpPr/>
           <p:nvPr/>
         </p:nvSpPr>
@@ -3619,14 +3565,14 @@
       </p:sp>
       <p:pic>
         <p:nvPicPr>
-          <p:cNvPr id="15" name="Picture 14" descr="logo.png"/>
+          <p:cNvPr id="14" name="Picture 13" descr="logo.png"/>
           <p:cNvPicPr>
             <a:picLocks noChangeAspect="1"/>
           </p:cNvPicPr>
           <p:nvPr/>
         </p:nvPicPr>
         <p:blipFill>
-          <a:blip r:embed="rId2"/>
+          <a:blip r:embed="rId3"/>
           <a:stretch>
             <a:fillRect/>
           </a:stretch>
@@ -3643,7 +3589,7 @@
       </p:pic>
       <p:sp>
         <p:nvSpPr>
-          <p:cNvPr id="16" name="Rounded Rectangle 15"/>
+          <p:cNvPr id="15" name="Rounded Rectangle 14"/>
           <p:cNvSpPr/>
           <p:nvPr/>
         </p:nvSpPr>
@@ -3697,7 +3643,7 @@
       </p:sp>
       <p:sp>
         <p:nvSpPr>
-          <p:cNvPr id="17" name="Rounded Rectangle 16"/>
+          <p:cNvPr id="16" name="Rounded Rectangle 15"/>
           <p:cNvSpPr/>
           <p:nvPr/>
         </p:nvSpPr>
@@ -3751,7 +3697,7 @@
       </p:sp>
       <p:sp>
         <p:nvSpPr>
-          <p:cNvPr id="18" name="Rounded Rectangle 17"/>
+          <p:cNvPr id="17" name="Rounded Rectangle 16"/>
           <p:cNvSpPr/>
           <p:nvPr/>
         </p:nvSpPr>
@@ -3805,7 +3751,7 @@
       </p:sp>
       <p:sp>
         <p:nvSpPr>
-          <p:cNvPr id="19" name="Rounded Rectangle 18"/>
+          <p:cNvPr id="18" name="Rounded Rectangle 17"/>
           <p:cNvSpPr/>
           <p:nvPr/>
         </p:nvSpPr>
@@ -3859,7 +3805,7 @@
       </p:sp>
       <p:sp>
         <p:nvSpPr>
-          <p:cNvPr id="20" name="Rounded Rectangle 19"/>
+          <p:cNvPr id="19" name="Rounded Rectangle 18"/>
           <p:cNvSpPr/>
           <p:nvPr/>
         </p:nvSpPr>
@@ -3988,8 +3934,8 @@
         </p:nvSpPr>
         <p:spPr>
           <a:xfrm>
-            <a:off x="3177540" y="-868680"/>
-            <a:ext cx="2743200" cy="2743200"/>
+            <a:off x="3817620" y="8001000"/>
+            <a:ext cx="1920240" cy="1920240"/>
           </a:xfrm>
           <a:prstGeom prst="ellipse">
             <a:avLst/>
@@ -4066,45 +4012,30 @@
           </a:p>
         </p:txBody>
       </p:sp>
-      <p:sp>
-        <p:nvSpPr>
-          <p:cNvPr id="5" name="TextBox 4"/>
-          <p:cNvSpPr txBox="1"/>
+      <p:pic>
+        <p:nvPicPr>
+          <p:cNvPr id="5" name="Picture 4" descr="russkiy-bit-logo.png"/>
+          <p:cNvPicPr>
+            <a:picLocks noChangeAspect="1"/>
+          </p:cNvPicPr>
           <p:nvPr/>
-        </p:nvSpPr>
-        <p:spPr>
-          <a:xfrm>
-            <a:off x="4091939" y="8759952"/>
-            <a:ext cx="685800" cy="164592"/>
+        </p:nvPicPr>
+        <p:blipFill>
+          <a:blip r:embed="rId2"/>
+          <a:stretch>
+            <a:fillRect/>
+          </a:stretch>
+        </p:blipFill>
+        <p:spPr>
+          <a:xfrm>
+            <a:off x="3543300" y="256032"/>
+            <a:ext cx="1234440" cy="298767"/>
           </a:xfrm>
           <a:prstGeom prst="rect">
             <a:avLst/>
           </a:prstGeom>
-          <a:noFill/>
-        </p:spPr>
-        <p:txBody>
-          <a:bodyPr wrap="square" lIns="0" rIns="0" tIns="0" bIns="0" anchor="t">
-            <a:spAutoFit/>
-          </a:bodyPr>
-          <a:lstStyle/>
-          <a:p>
-            <a:pPr algn="r">
-              <a:lnSpc>
-                <a:spcPct val="100000"/>
-              </a:lnSpc>
-            </a:pPr>
-            <a:r>
-              <a:rPr sz="800" b="1">
-                <a:solidFill>
-                  <a:srgbClr val="5A7082"/>
-                </a:solidFill>
-                <a:latin typeface="Open Sans"/>
-              </a:rPr>
-              <a:t>02 / 03</a:t>
-            </a:r>
-          </a:p>
-        </p:txBody>
-      </p:sp>
+        </p:spPr>
+      </p:pic>
       <p:sp>
         <p:nvSpPr>
           <p:cNvPr id="6" name="TextBox 5"/>
@@ -4113,47 +4044,8 @@
         </p:nvSpPr>
         <p:spPr>
           <a:xfrm>
-            <a:off x="384048" y="8759952"/>
-            <a:ext cx="2286000" cy="164592"/>
-          </a:xfrm>
-          <a:prstGeom prst="rect">
-            <a:avLst/>
-          </a:prstGeom>
-          <a:noFill/>
-        </p:spPr>
-        <p:txBody>
-          <a:bodyPr wrap="square" lIns="0" rIns="0" tIns="0" bIns="0" anchor="t">
-            <a:spAutoFit/>
-          </a:bodyPr>
-          <a:lstStyle/>
-          <a:p>
-            <a:pPr algn="l">
-              <a:lnSpc>
-                <a:spcPct val="100000"/>
-              </a:lnSpc>
-            </a:pPr>
-            <a:r>
-              <a:rPr sz="800" b="0">
-                <a:solidFill>
-                  <a:srgbClr val="5A7082"/>
-                </a:solidFill>
-                <a:latin typeface="Open Sans"/>
-              </a:rPr>
-              <a:t>Битрикс24 • клиентские проекты</a:t>
-            </a:r>
-          </a:p>
-        </p:txBody>
-      </p:sp>
-      <p:sp>
-        <p:nvSpPr>
-          <p:cNvPr id="7" name="TextBox 6"/>
-          <p:cNvSpPr txBox="1"/>
-          <p:nvPr/>
-        </p:nvSpPr>
-        <p:spPr>
-          <a:xfrm>
             <a:off x="475488" y="502920"/>
-            <a:ext cx="4192524" cy="1051560"/>
+            <a:ext cx="2884932" cy="1051560"/>
           </a:xfrm>
           <a:prstGeom prst="rect">
             <a:avLst/>
@@ -4172,7 +4064,7 @@
               </a:lnSpc>
             </a:pPr>
             <a:r>
-              <a:rPr sz="2400" b="1">
+              <a:rPr sz="2150" b="1">
                 <a:solidFill>
                   <a:srgbClr val="10293E"/>
                 </a:solidFill>
@@ -4185,7 +4077,7 @@
       </p:sp>
       <p:sp>
         <p:nvSpPr>
-          <p:cNvPr id="8" name="TextBox 7"/>
+          <p:cNvPr id="7" name="TextBox 6"/>
           <p:cNvSpPr txBox="1"/>
           <p:nvPr/>
         </p:nvSpPr>
@@ -4222,9 +4114,290 @@
           </a:p>
         </p:txBody>
       </p:sp>
-      <p:sp>
-        <p:nvSpPr>
-          <p:cNvPr id="9" name="Rounded Rectangle 8"/>
+      <p:cxnSp>
+        <p:nvCxnSpPr>
+          <p:cNvPr id="8" name="Connector 7"/>
+          <p:cNvCxnSpPr/>
+          <p:nvPr/>
+        </p:nvCxnSpPr>
+        <p:spPr>
+          <a:xfrm>
+            <a:off x="1463039" y="5394960"/>
+            <a:ext cx="2286000" cy="0"/>
+          </a:xfrm>
+          <a:prstGeom prst="line">
+            <a:avLst/>
+          </a:prstGeom>
+          <a:ln w="16510">
+            <a:solidFill>
+              <a:srgbClr val="409EEF"/>
+            </a:solidFill>
+          </a:ln>
+        </p:spPr>
+        <p:style>
+          <a:lnRef idx="2">
+            <a:schemeClr val="accent1"/>
+          </a:lnRef>
+          <a:fillRef idx="0">
+            <a:schemeClr val="accent1"/>
+          </a:fillRef>
+          <a:effectRef idx="1">
+            <a:schemeClr val="accent1"/>
+          </a:effectRef>
+          <a:fontRef idx="minor">
+            <a:schemeClr val="tx1"/>
+          </a:fontRef>
+        </p:style>
+      </p:cxnSp>
+      <p:cxnSp>
+        <p:nvCxnSpPr>
+          <p:cNvPr id="9" name="Connector 8"/>
+          <p:cNvCxnSpPr/>
+          <p:nvPr/>
+        </p:nvCxnSpPr>
+        <p:spPr>
+          <a:xfrm>
+            <a:off x="1463039" y="3063239"/>
+            <a:ext cx="0" cy="2331721"/>
+          </a:xfrm>
+          <a:prstGeom prst="line">
+            <a:avLst/>
+          </a:prstGeom>
+          <a:ln w="14604">
+            <a:solidFill>
+              <a:srgbClr val="409EEF"/>
+            </a:solidFill>
+          </a:ln>
+        </p:spPr>
+        <p:style>
+          <a:lnRef idx="2">
+            <a:schemeClr val="accent1"/>
+          </a:lnRef>
+          <a:fillRef idx="0">
+            <a:schemeClr val="accent1"/>
+          </a:fillRef>
+          <a:effectRef idx="1">
+            <a:schemeClr val="accent1"/>
+          </a:effectRef>
+          <a:fontRef idx="minor">
+            <a:schemeClr val="tx1"/>
+          </a:fontRef>
+        </p:style>
+      </p:cxnSp>
+      <p:cxnSp>
+        <p:nvCxnSpPr>
+          <p:cNvPr id="10" name="Connector 9"/>
+          <p:cNvCxnSpPr/>
+          <p:nvPr/>
+        </p:nvCxnSpPr>
+        <p:spPr>
+          <a:xfrm>
+            <a:off x="3749039" y="3063239"/>
+            <a:ext cx="0" cy="2331721"/>
+          </a:xfrm>
+          <a:prstGeom prst="line">
+            <a:avLst/>
+          </a:prstGeom>
+          <a:ln w="14604">
+            <a:solidFill>
+              <a:srgbClr val="409EEF"/>
+            </a:solidFill>
+          </a:ln>
+        </p:spPr>
+        <p:style>
+          <a:lnRef idx="2">
+            <a:schemeClr val="accent1"/>
+          </a:lnRef>
+          <a:fillRef idx="0">
+            <a:schemeClr val="accent1"/>
+          </a:fillRef>
+          <a:effectRef idx="1">
+            <a:schemeClr val="accent1"/>
+          </a:effectRef>
+          <a:fontRef idx="minor">
+            <a:schemeClr val="tx1"/>
+          </a:fontRef>
+        </p:style>
+      </p:cxnSp>
+      <p:cxnSp>
+        <p:nvCxnSpPr>
+          <p:cNvPr id="11" name="Connector 10"/>
+          <p:cNvCxnSpPr/>
+          <p:nvPr/>
+        </p:nvCxnSpPr>
+        <p:spPr>
+          <a:xfrm>
+            <a:off x="1463039" y="4078224"/>
+            <a:ext cx="0" cy="1316736"/>
+          </a:xfrm>
+          <a:prstGeom prst="line">
+            <a:avLst/>
+          </a:prstGeom>
+          <a:ln w="14604">
+            <a:solidFill>
+              <a:srgbClr val="409EEF"/>
+            </a:solidFill>
+          </a:ln>
+        </p:spPr>
+        <p:style>
+          <a:lnRef idx="2">
+            <a:schemeClr val="accent1"/>
+          </a:lnRef>
+          <a:fillRef idx="0">
+            <a:schemeClr val="accent1"/>
+          </a:fillRef>
+          <a:effectRef idx="1">
+            <a:schemeClr val="accent1"/>
+          </a:effectRef>
+          <a:fontRef idx="minor">
+            <a:schemeClr val="tx1"/>
+          </a:fontRef>
+        </p:style>
+      </p:cxnSp>
+      <p:cxnSp>
+        <p:nvCxnSpPr>
+          <p:cNvPr id="12" name="Connector 11"/>
+          <p:cNvCxnSpPr/>
+          <p:nvPr/>
+        </p:nvCxnSpPr>
+        <p:spPr>
+          <a:xfrm>
+            <a:off x="3749039" y="4078224"/>
+            <a:ext cx="0" cy="1316736"/>
+          </a:xfrm>
+          <a:prstGeom prst="line">
+            <a:avLst/>
+          </a:prstGeom>
+          <a:ln w="14604">
+            <a:solidFill>
+              <a:srgbClr val="409EEF"/>
+            </a:solidFill>
+          </a:ln>
+        </p:spPr>
+        <p:style>
+          <a:lnRef idx="2">
+            <a:schemeClr val="accent1"/>
+          </a:lnRef>
+          <a:fillRef idx="0">
+            <a:schemeClr val="accent1"/>
+          </a:fillRef>
+          <a:effectRef idx="1">
+            <a:schemeClr val="accent1"/>
+          </a:effectRef>
+          <a:fontRef idx="minor">
+            <a:schemeClr val="tx1"/>
+          </a:fontRef>
+        </p:style>
+      </p:cxnSp>
+      <p:cxnSp>
+        <p:nvCxnSpPr>
+          <p:cNvPr id="13" name="Connector 12"/>
+          <p:cNvCxnSpPr/>
+          <p:nvPr/>
+        </p:nvCxnSpPr>
+        <p:spPr>
+          <a:xfrm>
+            <a:off x="1463039" y="5093208"/>
+            <a:ext cx="0" cy="301752"/>
+          </a:xfrm>
+          <a:prstGeom prst="line">
+            <a:avLst/>
+          </a:prstGeom>
+          <a:ln w="14604">
+            <a:solidFill>
+              <a:srgbClr val="409EEF"/>
+            </a:solidFill>
+          </a:ln>
+        </p:spPr>
+        <p:style>
+          <a:lnRef idx="2">
+            <a:schemeClr val="accent1"/>
+          </a:lnRef>
+          <a:fillRef idx="0">
+            <a:schemeClr val="accent1"/>
+          </a:fillRef>
+          <a:effectRef idx="1">
+            <a:schemeClr val="accent1"/>
+          </a:effectRef>
+          <a:fontRef idx="minor">
+            <a:schemeClr val="tx1"/>
+          </a:fontRef>
+        </p:style>
+      </p:cxnSp>
+      <p:cxnSp>
+        <p:nvCxnSpPr>
+          <p:cNvPr id="14" name="Connector 13"/>
+          <p:cNvCxnSpPr/>
+          <p:nvPr/>
+        </p:nvCxnSpPr>
+        <p:spPr>
+          <a:xfrm>
+            <a:off x="3749039" y="5093208"/>
+            <a:ext cx="0" cy="301752"/>
+          </a:xfrm>
+          <a:prstGeom prst="line">
+            <a:avLst/>
+          </a:prstGeom>
+          <a:ln w="14604">
+            <a:solidFill>
+              <a:srgbClr val="409EEF"/>
+            </a:solidFill>
+          </a:ln>
+        </p:spPr>
+        <p:style>
+          <a:lnRef idx="2">
+            <a:schemeClr val="accent1"/>
+          </a:lnRef>
+          <a:fillRef idx="0">
+            <a:schemeClr val="accent1"/>
+          </a:fillRef>
+          <a:effectRef idx="1">
+            <a:schemeClr val="accent1"/>
+          </a:effectRef>
+          <a:fontRef idx="minor">
+            <a:schemeClr val="tx1"/>
+          </a:fontRef>
+        </p:style>
+      </p:cxnSp>
+      <p:cxnSp>
+        <p:nvCxnSpPr>
+          <p:cNvPr id="15" name="Connector 14"/>
+          <p:cNvCxnSpPr/>
+          <p:nvPr/>
+        </p:nvCxnSpPr>
+        <p:spPr>
+          <a:xfrm>
+            <a:off x="2571750" y="5394960"/>
+            <a:ext cx="0" cy="612648"/>
+          </a:xfrm>
+          <a:prstGeom prst="line">
+            <a:avLst/>
+          </a:prstGeom>
+          <a:ln w="30480">
+            <a:solidFill>
+              <a:srgbClr val="0066A1"/>
+            </a:solidFill>
+            <a:tailEnd type="triangle" w="med" len="med"/>
+          </a:ln>
+        </p:spPr>
+        <p:style>
+          <a:lnRef idx="2">
+            <a:schemeClr val="accent1"/>
+          </a:lnRef>
+          <a:fillRef idx="0">
+            <a:schemeClr val="accent1"/>
+          </a:fillRef>
+          <a:effectRef idx="1">
+            <a:schemeClr val="accent1"/>
+          </a:effectRef>
+          <a:fontRef idx="minor">
+            <a:schemeClr val="tx1"/>
+          </a:fontRef>
+        </p:style>
+      </p:cxnSp>
+      <p:sp>
+        <p:nvSpPr>
+          <p:cNvPr id="16" name="Rounded Rectangle 15"/>
           <p:cNvSpPr/>
           <p:nvPr/>
         </p:nvSpPr>
@@ -4278,7 +4451,7 @@
       </p:sp>
       <p:sp>
         <p:nvSpPr>
-          <p:cNvPr id="10" name="Rounded Rectangle 9"/>
+          <p:cNvPr id="17" name="Rounded Rectangle 16"/>
           <p:cNvSpPr/>
           <p:nvPr/>
         </p:nvSpPr>
@@ -4332,7 +4505,7 @@
       </p:sp>
       <p:sp>
         <p:nvSpPr>
-          <p:cNvPr id="11" name="Rounded Rectangle 10"/>
+          <p:cNvPr id="18" name="Rounded Rectangle 17"/>
           <p:cNvSpPr/>
           <p:nvPr/>
         </p:nvSpPr>
@@ -4386,7 +4559,7 @@
       </p:sp>
       <p:sp>
         <p:nvSpPr>
-          <p:cNvPr id="12" name="Rounded Rectangle 11"/>
+          <p:cNvPr id="19" name="Rounded Rectangle 18"/>
           <p:cNvSpPr/>
           <p:nvPr/>
         </p:nvSpPr>
@@ -4440,7 +4613,7 @@
       </p:sp>
       <p:sp>
         <p:nvSpPr>
-          <p:cNvPr id="13" name="Rounded Rectangle 12"/>
+          <p:cNvPr id="20" name="Rounded Rectangle 19"/>
           <p:cNvSpPr/>
           <p:nvPr/>
         </p:nvSpPr>
@@ -4494,7 +4667,7 @@
       </p:sp>
       <p:sp>
         <p:nvSpPr>
-          <p:cNvPr id="14" name="Rounded Rectangle 13"/>
+          <p:cNvPr id="21" name="Rounded Rectangle 20"/>
           <p:cNvSpPr/>
           <p:nvPr/>
         </p:nvSpPr>
@@ -4546,290 +4719,9 @@
           </a:p>
         </p:txBody>
       </p:sp>
-      <p:cxnSp>
-        <p:nvCxnSpPr>
-          <p:cNvPr id="15" name="Connector 14"/>
-          <p:cNvCxnSpPr/>
-          <p:nvPr/>
-        </p:nvCxnSpPr>
-        <p:spPr>
-          <a:xfrm>
-            <a:off x="1463039" y="5394960"/>
-            <a:ext cx="2286000" cy="0"/>
-          </a:xfrm>
-          <a:prstGeom prst="line">
-            <a:avLst/>
-          </a:prstGeom>
-          <a:ln w="16510">
-            <a:solidFill>
-              <a:srgbClr val="409EEF"/>
-            </a:solidFill>
-          </a:ln>
-        </p:spPr>
-        <p:style>
-          <a:lnRef idx="2">
-            <a:schemeClr val="accent1"/>
-          </a:lnRef>
-          <a:fillRef idx="0">
-            <a:schemeClr val="accent1"/>
-          </a:fillRef>
-          <a:effectRef idx="1">
-            <a:schemeClr val="accent1"/>
-          </a:effectRef>
-          <a:fontRef idx="minor">
-            <a:schemeClr val="tx1"/>
-          </a:fontRef>
-        </p:style>
-      </p:cxnSp>
-      <p:cxnSp>
-        <p:nvCxnSpPr>
-          <p:cNvPr id="16" name="Connector 15"/>
-          <p:cNvCxnSpPr/>
-          <p:nvPr/>
-        </p:nvCxnSpPr>
-        <p:spPr>
-          <a:xfrm>
-            <a:off x="1463039" y="3063239"/>
-            <a:ext cx="0" cy="2331721"/>
-          </a:xfrm>
-          <a:prstGeom prst="line">
-            <a:avLst/>
-          </a:prstGeom>
-          <a:ln w="14604">
-            <a:solidFill>
-              <a:srgbClr val="409EEF"/>
-            </a:solidFill>
-          </a:ln>
-        </p:spPr>
-        <p:style>
-          <a:lnRef idx="2">
-            <a:schemeClr val="accent1"/>
-          </a:lnRef>
-          <a:fillRef idx="0">
-            <a:schemeClr val="accent1"/>
-          </a:fillRef>
-          <a:effectRef idx="1">
-            <a:schemeClr val="accent1"/>
-          </a:effectRef>
-          <a:fontRef idx="minor">
-            <a:schemeClr val="tx1"/>
-          </a:fontRef>
-        </p:style>
-      </p:cxnSp>
-      <p:cxnSp>
-        <p:nvCxnSpPr>
-          <p:cNvPr id="17" name="Connector 16"/>
-          <p:cNvCxnSpPr/>
-          <p:nvPr/>
-        </p:nvCxnSpPr>
-        <p:spPr>
-          <a:xfrm>
-            <a:off x="3749039" y="3063239"/>
-            <a:ext cx="0" cy="2331721"/>
-          </a:xfrm>
-          <a:prstGeom prst="line">
-            <a:avLst/>
-          </a:prstGeom>
-          <a:ln w="14604">
-            <a:solidFill>
-              <a:srgbClr val="409EEF"/>
-            </a:solidFill>
-          </a:ln>
-        </p:spPr>
-        <p:style>
-          <a:lnRef idx="2">
-            <a:schemeClr val="accent1"/>
-          </a:lnRef>
-          <a:fillRef idx="0">
-            <a:schemeClr val="accent1"/>
-          </a:fillRef>
-          <a:effectRef idx="1">
-            <a:schemeClr val="accent1"/>
-          </a:effectRef>
-          <a:fontRef idx="minor">
-            <a:schemeClr val="tx1"/>
-          </a:fontRef>
-        </p:style>
-      </p:cxnSp>
-      <p:cxnSp>
-        <p:nvCxnSpPr>
-          <p:cNvPr id="18" name="Connector 17"/>
-          <p:cNvCxnSpPr/>
-          <p:nvPr/>
-        </p:nvCxnSpPr>
-        <p:spPr>
-          <a:xfrm>
-            <a:off x="1463039" y="4078224"/>
-            <a:ext cx="0" cy="1316736"/>
-          </a:xfrm>
-          <a:prstGeom prst="line">
-            <a:avLst/>
-          </a:prstGeom>
-          <a:ln w="14604">
-            <a:solidFill>
-              <a:srgbClr val="409EEF"/>
-            </a:solidFill>
-          </a:ln>
-        </p:spPr>
-        <p:style>
-          <a:lnRef idx="2">
-            <a:schemeClr val="accent1"/>
-          </a:lnRef>
-          <a:fillRef idx="0">
-            <a:schemeClr val="accent1"/>
-          </a:fillRef>
-          <a:effectRef idx="1">
-            <a:schemeClr val="accent1"/>
-          </a:effectRef>
-          <a:fontRef idx="minor">
-            <a:schemeClr val="tx1"/>
-          </a:fontRef>
-        </p:style>
-      </p:cxnSp>
-      <p:cxnSp>
-        <p:nvCxnSpPr>
-          <p:cNvPr id="19" name="Connector 18"/>
-          <p:cNvCxnSpPr/>
-          <p:nvPr/>
-        </p:nvCxnSpPr>
-        <p:spPr>
-          <a:xfrm>
-            <a:off x="3749039" y="4078224"/>
-            <a:ext cx="0" cy="1316736"/>
-          </a:xfrm>
-          <a:prstGeom prst="line">
-            <a:avLst/>
-          </a:prstGeom>
-          <a:ln w="14604">
-            <a:solidFill>
-              <a:srgbClr val="409EEF"/>
-            </a:solidFill>
-          </a:ln>
-        </p:spPr>
-        <p:style>
-          <a:lnRef idx="2">
-            <a:schemeClr val="accent1"/>
-          </a:lnRef>
-          <a:fillRef idx="0">
-            <a:schemeClr val="accent1"/>
-          </a:fillRef>
-          <a:effectRef idx="1">
-            <a:schemeClr val="accent1"/>
-          </a:effectRef>
-          <a:fontRef idx="minor">
-            <a:schemeClr val="tx1"/>
-          </a:fontRef>
-        </p:style>
-      </p:cxnSp>
-      <p:cxnSp>
-        <p:nvCxnSpPr>
-          <p:cNvPr id="20" name="Connector 19"/>
-          <p:cNvCxnSpPr/>
-          <p:nvPr/>
-        </p:nvCxnSpPr>
-        <p:spPr>
-          <a:xfrm>
-            <a:off x="1463039" y="5093208"/>
-            <a:ext cx="0" cy="301752"/>
-          </a:xfrm>
-          <a:prstGeom prst="line">
-            <a:avLst/>
-          </a:prstGeom>
-          <a:ln w="14604">
-            <a:solidFill>
-              <a:srgbClr val="409EEF"/>
-            </a:solidFill>
-          </a:ln>
-        </p:spPr>
-        <p:style>
-          <a:lnRef idx="2">
-            <a:schemeClr val="accent1"/>
-          </a:lnRef>
-          <a:fillRef idx="0">
-            <a:schemeClr val="accent1"/>
-          </a:fillRef>
-          <a:effectRef idx="1">
-            <a:schemeClr val="accent1"/>
-          </a:effectRef>
-          <a:fontRef idx="minor">
-            <a:schemeClr val="tx1"/>
-          </a:fontRef>
-        </p:style>
-      </p:cxnSp>
-      <p:cxnSp>
-        <p:nvCxnSpPr>
-          <p:cNvPr id="21" name="Connector 20"/>
-          <p:cNvCxnSpPr/>
-          <p:nvPr/>
-        </p:nvCxnSpPr>
-        <p:spPr>
-          <a:xfrm>
-            <a:off x="3749039" y="5093208"/>
-            <a:ext cx="0" cy="301752"/>
-          </a:xfrm>
-          <a:prstGeom prst="line">
-            <a:avLst/>
-          </a:prstGeom>
-          <a:ln w="14604">
-            <a:solidFill>
-              <a:srgbClr val="409EEF"/>
-            </a:solidFill>
-          </a:ln>
-        </p:spPr>
-        <p:style>
-          <a:lnRef idx="2">
-            <a:schemeClr val="accent1"/>
-          </a:lnRef>
-          <a:fillRef idx="0">
-            <a:schemeClr val="accent1"/>
-          </a:fillRef>
-          <a:effectRef idx="1">
-            <a:schemeClr val="accent1"/>
-          </a:effectRef>
-          <a:fontRef idx="minor">
-            <a:schemeClr val="tx1"/>
-          </a:fontRef>
-        </p:style>
-      </p:cxnSp>
-      <p:cxnSp>
-        <p:nvCxnSpPr>
-          <p:cNvPr id="22" name="Connector 21"/>
-          <p:cNvCxnSpPr/>
-          <p:nvPr/>
-        </p:nvCxnSpPr>
-        <p:spPr>
-          <a:xfrm>
-            <a:off x="2571750" y="5394960"/>
-            <a:ext cx="0" cy="612648"/>
-          </a:xfrm>
-          <a:prstGeom prst="line">
-            <a:avLst/>
-          </a:prstGeom>
-          <a:ln w="30480">
-            <a:solidFill>
-              <a:srgbClr val="0066A1"/>
-            </a:solidFill>
-            <a:tailEnd type="triangle" w="med" len="med"/>
-          </a:ln>
-        </p:spPr>
-        <p:style>
-          <a:lnRef idx="2">
-            <a:schemeClr val="accent1"/>
-          </a:lnRef>
-          <a:fillRef idx="0">
-            <a:schemeClr val="accent1"/>
-          </a:fillRef>
-          <a:effectRef idx="1">
-            <a:schemeClr val="accent1"/>
-          </a:effectRef>
-          <a:fontRef idx="minor">
-            <a:schemeClr val="tx1"/>
-          </a:fontRef>
-        </p:style>
-      </p:cxnSp>
-      <p:sp>
-        <p:nvSpPr>
-          <p:cNvPr id="23" name="Rounded Rectangle 22"/>
+      <p:sp>
+        <p:nvSpPr>
+          <p:cNvPr id="22" name="Rounded Rectangle 21"/>
           <p:cNvSpPr/>
           <p:nvPr/>
         </p:nvSpPr>
@@ -4958,8 +4850,8 @@
         </p:nvSpPr>
         <p:spPr>
           <a:xfrm>
-            <a:off x="3177540" y="-868680"/>
-            <a:ext cx="2743200" cy="2743200"/>
+            <a:off x="3817620" y="8001000"/>
+            <a:ext cx="1920240" cy="1920240"/>
           </a:xfrm>
           <a:prstGeom prst="ellipse">
             <a:avLst/>
@@ -5036,751 +4928,9 @@
           </a:p>
         </p:txBody>
       </p:sp>
-      <p:sp>
-        <p:nvSpPr>
-          <p:cNvPr id="5" name="TextBox 4"/>
-          <p:cNvSpPr txBox="1"/>
-          <p:nvPr/>
-        </p:nvSpPr>
-        <p:spPr>
-          <a:xfrm>
-            <a:off x="4091939" y="8759952"/>
-            <a:ext cx="685800" cy="164592"/>
-          </a:xfrm>
-          <a:prstGeom prst="rect">
-            <a:avLst/>
-          </a:prstGeom>
-          <a:noFill/>
-        </p:spPr>
-        <p:txBody>
-          <a:bodyPr wrap="square" lIns="0" rIns="0" tIns="0" bIns="0" anchor="t">
-            <a:spAutoFit/>
-          </a:bodyPr>
-          <a:lstStyle/>
-          <a:p>
-            <a:pPr algn="r">
-              <a:lnSpc>
-                <a:spcPct val="100000"/>
-              </a:lnSpc>
-            </a:pPr>
-            <a:r>
-              <a:rPr sz="800" b="1">
-                <a:solidFill>
-                  <a:srgbClr val="5A7082"/>
-                </a:solidFill>
-                <a:latin typeface="Open Sans"/>
-              </a:rPr>
-              <a:t>03 / 03</a:t>
-            </a:r>
-          </a:p>
-        </p:txBody>
-      </p:sp>
-      <p:sp>
-        <p:nvSpPr>
-          <p:cNvPr id="6" name="TextBox 5"/>
-          <p:cNvSpPr txBox="1"/>
-          <p:nvPr/>
-        </p:nvSpPr>
-        <p:spPr>
-          <a:xfrm>
-            <a:off x="384048" y="8759952"/>
-            <a:ext cx="2286000" cy="164592"/>
-          </a:xfrm>
-          <a:prstGeom prst="rect">
-            <a:avLst/>
-          </a:prstGeom>
-          <a:noFill/>
-        </p:spPr>
-        <p:txBody>
-          <a:bodyPr wrap="square" lIns="0" rIns="0" tIns="0" bIns="0" anchor="t">
-            <a:spAutoFit/>
-          </a:bodyPr>
-          <a:lstStyle/>
-          <a:p>
-            <a:pPr algn="l">
-              <a:lnSpc>
-                <a:spcPct val="100000"/>
-              </a:lnSpc>
-            </a:pPr>
-            <a:r>
-              <a:rPr sz="800" b="0">
-                <a:solidFill>
-                  <a:srgbClr val="5A7082"/>
-                </a:solidFill>
-                <a:latin typeface="Open Sans"/>
-              </a:rPr>
-              <a:t>Битрикс24 • клиентские проекты</a:t>
-            </a:r>
-          </a:p>
-        </p:txBody>
-      </p:sp>
-      <p:sp>
-        <p:nvSpPr>
-          <p:cNvPr id="7" name="TextBox 6"/>
-          <p:cNvSpPr txBox="1"/>
-          <p:nvPr/>
-        </p:nvSpPr>
-        <p:spPr>
-          <a:xfrm>
-            <a:off x="475488" y="502920"/>
-            <a:ext cx="4192524" cy="1051560"/>
-          </a:xfrm>
-          <a:prstGeom prst="rect">
-            <a:avLst/>
-          </a:prstGeom>
-          <a:noFill/>
-        </p:spPr>
-        <p:txBody>
-          <a:bodyPr wrap="square" lIns="0" rIns="0" tIns="0" bIns="0" anchor="t">
-            <a:spAutoFit/>
-          </a:bodyPr>
-          <a:lstStyle/>
-          <a:p>
-            <a:pPr algn="l">
-              <a:lnSpc>
-                <a:spcPct val="90000"/>
-              </a:lnSpc>
-            </a:pPr>
-            <a:r>
-              <a:rPr sz="2400" b="1">
-                <a:solidFill>
-                  <a:srgbClr val="10293E"/>
-                </a:solidFill>
-                <a:latin typeface="Montserrat"/>
-              </a:rPr>
-              <a:t>Вывод: нужен честный грамотный партнёр</a:t>
-            </a:r>
-          </a:p>
-        </p:txBody>
-      </p:sp>
-      <p:sp>
-        <p:nvSpPr>
-          <p:cNvPr id="8" name="Rounded Rectangle 7"/>
-          <p:cNvSpPr/>
-          <p:nvPr/>
-        </p:nvSpPr>
-        <p:spPr>
-          <a:xfrm>
-            <a:off x="420624" y="1655064"/>
-            <a:ext cx="4370832" cy="749808"/>
-          </a:xfrm>
-          <a:prstGeom prst="roundRect">
-            <a:avLst/>
-          </a:prstGeom>
-          <a:solidFill>
-            <a:srgbClr val="FFFFFF"/>
-          </a:solidFill>
-          <a:ln w="13970">
-            <a:solidFill>
-              <a:srgbClr val="D8E9F3"/>
-            </a:solidFill>
-          </a:ln>
-        </p:spPr>
-        <p:style>
-          <a:lnRef idx="1">
-            <a:schemeClr val="accent1"/>
-          </a:lnRef>
-          <a:fillRef idx="3">
-            <a:schemeClr val="accent1"/>
-          </a:fillRef>
-          <a:effectRef idx="2">
-            <a:schemeClr val="accent1"/>
-          </a:effectRef>
-          <a:fontRef idx="minor">
-            <a:schemeClr val="lt1"/>
-          </a:fontRef>
-        </p:style>
-        <p:txBody>
-          <a:bodyPr rtlCol="0" anchor="ctr"/>
-          <a:lstStyle/>
-          <a:p>
-            <a:pPr algn="ctr"/>
-          </a:p>
-        </p:txBody>
-      </p:sp>
-      <p:sp>
-        <p:nvSpPr>
-          <p:cNvPr id="9" name="Oval 8"/>
-          <p:cNvSpPr/>
-          <p:nvPr/>
-        </p:nvSpPr>
-        <p:spPr>
-          <a:xfrm>
-            <a:off x="557784" y="1773936"/>
-            <a:ext cx="512064" cy="512064"/>
-          </a:xfrm>
-          <a:prstGeom prst="ellipse">
-            <a:avLst/>
-          </a:prstGeom>
-          <a:solidFill>
-            <a:srgbClr val="2FC7F7"/>
-          </a:solidFill>
-          <a:ln>
-            <a:noFill/>
-          </a:ln>
-        </p:spPr>
-        <p:style>
-          <a:lnRef idx="1">
-            <a:schemeClr val="accent1"/>
-          </a:lnRef>
-          <a:fillRef idx="3">
-            <a:schemeClr val="accent1"/>
-          </a:fillRef>
-          <a:effectRef idx="2">
-            <a:schemeClr val="accent1"/>
-          </a:effectRef>
-          <a:fontRef idx="minor">
-            <a:schemeClr val="lt1"/>
-          </a:fontRef>
-        </p:style>
-        <p:txBody>
-          <a:bodyPr rtlCol="0" anchor="ctr"/>
-          <a:lstStyle/>
-          <a:p>
-            <a:pPr algn="ctr"/>
-          </a:p>
-        </p:txBody>
-      </p:sp>
-      <p:sp>
-        <p:nvSpPr>
-          <p:cNvPr id="10" name="TextBox 9"/>
-          <p:cNvSpPr txBox="1"/>
-          <p:nvPr/>
-        </p:nvSpPr>
-        <p:spPr>
-          <a:xfrm>
-            <a:off x="557784" y="1773936"/>
-            <a:ext cx="512064" cy="512064"/>
-          </a:xfrm>
-          <a:prstGeom prst="rect">
-            <a:avLst/>
-          </a:prstGeom>
-          <a:noFill/>
-        </p:spPr>
-        <p:txBody>
-          <a:bodyPr wrap="square" lIns="0" rIns="0" tIns="0" bIns="0" anchor="ctr">
-            <a:spAutoFit/>
-          </a:bodyPr>
-          <a:lstStyle/>
-          <a:p>
-            <a:pPr algn="ctr">
-              <a:lnSpc>
-                <a:spcPct val="100000"/>
-              </a:lnSpc>
-            </a:pPr>
-            <a:r>
-              <a:rPr sz="1000" b="1">
-                <a:solidFill>
-                  <a:srgbClr val="0066A1"/>
-                </a:solidFill>
-                <a:latin typeface="Montserrat"/>
-              </a:rPr>
-              <a:t>01</a:t>
-            </a:r>
-          </a:p>
-        </p:txBody>
-      </p:sp>
-      <p:sp>
-        <p:nvSpPr>
-          <p:cNvPr id="11" name="TextBox 10"/>
-          <p:cNvSpPr txBox="1"/>
-          <p:nvPr/>
-        </p:nvSpPr>
-        <p:spPr>
-          <a:xfrm>
-            <a:off x="1207008" y="1746504"/>
-            <a:ext cx="3438144" cy="566928"/>
-          </a:xfrm>
-          <a:prstGeom prst="rect">
-            <a:avLst/>
-          </a:prstGeom>
-          <a:noFill/>
-        </p:spPr>
-        <p:txBody>
-          <a:bodyPr wrap="square" lIns="0" rIns="0" tIns="0" bIns="0" anchor="ctr">
-            <a:spAutoFit/>
-          </a:bodyPr>
-          <a:lstStyle/>
-          <a:p>
-            <a:pPr algn="l">
-              <a:lnSpc>
-                <a:spcPct val="100000"/>
-              </a:lnSpc>
-            </a:pPr>
-            <a:r>
-              <a:rPr sz="1150" b="1">
-                <a:solidFill>
-                  <a:srgbClr val="10293E"/>
-                </a:solidFill>
-                <a:latin typeface="Montserrat"/>
-              </a:rPr>
-              <a:t>Говорит на одном языке с вами и клиентом</a:t>
-            </a:r>
-          </a:p>
-        </p:txBody>
-      </p:sp>
-      <p:sp>
-        <p:nvSpPr>
-          <p:cNvPr id="12" name="Rounded Rectangle 11"/>
-          <p:cNvSpPr/>
-          <p:nvPr/>
-        </p:nvSpPr>
-        <p:spPr>
-          <a:xfrm>
-            <a:off x="420624" y="2569464"/>
-            <a:ext cx="4370832" cy="749808"/>
-          </a:xfrm>
-          <a:prstGeom prst="roundRect">
-            <a:avLst/>
-          </a:prstGeom>
-          <a:solidFill>
-            <a:srgbClr val="FFFFFF"/>
-          </a:solidFill>
-          <a:ln w="13970">
-            <a:solidFill>
-              <a:srgbClr val="D8E9F3"/>
-            </a:solidFill>
-          </a:ln>
-        </p:spPr>
-        <p:style>
-          <a:lnRef idx="1">
-            <a:schemeClr val="accent1"/>
-          </a:lnRef>
-          <a:fillRef idx="3">
-            <a:schemeClr val="accent1"/>
-          </a:fillRef>
-          <a:effectRef idx="2">
-            <a:schemeClr val="accent1"/>
-          </a:effectRef>
-          <a:fontRef idx="minor">
-            <a:schemeClr val="lt1"/>
-          </a:fontRef>
-        </p:style>
-        <p:txBody>
-          <a:bodyPr rtlCol="0" anchor="ctr"/>
-          <a:lstStyle/>
-          <a:p>
-            <a:pPr algn="ctr"/>
-          </a:p>
-        </p:txBody>
-      </p:sp>
-      <p:sp>
-        <p:nvSpPr>
-          <p:cNvPr id="13" name="Oval 12"/>
-          <p:cNvSpPr/>
-          <p:nvPr/>
-        </p:nvSpPr>
-        <p:spPr>
-          <a:xfrm>
-            <a:off x="557784" y="2688336"/>
-            <a:ext cx="512064" cy="512064"/>
-          </a:xfrm>
-          <a:prstGeom prst="ellipse">
-            <a:avLst/>
-          </a:prstGeom>
-          <a:solidFill>
-            <a:srgbClr val="2FC7F7"/>
-          </a:solidFill>
-          <a:ln>
-            <a:noFill/>
-          </a:ln>
-        </p:spPr>
-        <p:style>
-          <a:lnRef idx="1">
-            <a:schemeClr val="accent1"/>
-          </a:lnRef>
-          <a:fillRef idx="3">
-            <a:schemeClr val="accent1"/>
-          </a:fillRef>
-          <a:effectRef idx="2">
-            <a:schemeClr val="accent1"/>
-          </a:effectRef>
-          <a:fontRef idx="minor">
-            <a:schemeClr val="lt1"/>
-          </a:fontRef>
-        </p:style>
-        <p:txBody>
-          <a:bodyPr rtlCol="0" anchor="ctr"/>
-          <a:lstStyle/>
-          <a:p>
-            <a:pPr algn="ctr"/>
-          </a:p>
-        </p:txBody>
-      </p:sp>
-      <p:sp>
-        <p:nvSpPr>
-          <p:cNvPr id="14" name="TextBox 13"/>
-          <p:cNvSpPr txBox="1"/>
-          <p:nvPr/>
-        </p:nvSpPr>
-        <p:spPr>
-          <a:xfrm>
-            <a:off x="557784" y="2688336"/>
-            <a:ext cx="512064" cy="512064"/>
-          </a:xfrm>
-          <a:prstGeom prst="rect">
-            <a:avLst/>
-          </a:prstGeom>
-          <a:noFill/>
-        </p:spPr>
-        <p:txBody>
-          <a:bodyPr wrap="square" lIns="0" rIns="0" tIns="0" bIns="0" anchor="ctr">
-            <a:spAutoFit/>
-          </a:bodyPr>
-          <a:lstStyle/>
-          <a:p>
-            <a:pPr algn="ctr">
-              <a:lnSpc>
-                <a:spcPct val="100000"/>
-              </a:lnSpc>
-            </a:pPr>
-            <a:r>
-              <a:rPr sz="1000" b="1">
-                <a:solidFill>
-                  <a:srgbClr val="0066A1"/>
-                </a:solidFill>
-                <a:latin typeface="Montserrat"/>
-              </a:rPr>
-              <a:t>02</a:t>
-            </a:r>
-          </a:p>
-        </p:txBody>
-      </p:sp>
-      <p:sp>
-        <p:nvSpPr>
-          <p:cNvPr id="15" name="TextBox 14"/>
-          <p:cNvSpPr txBox="1"/>
-          <p:nvPr/>
-        </p:nvSpPr>
-        <p:spPr>
-          <a:xfrm>
-            <a:off x="1207008" y="2660904"/>
-            <a:ext cx="3438144" cy="566928"/>
-          </a:xfrm>
-          <a:prstGeom prst="rect">
-            <a:avLst/>
-          </a:prstGeom>
-          <a:noFill/>
-        </p:spPr>
-        <p:txBody>
-          <a:bodyPr wrap="square" lIns="0" rIns="0" tIns="0" bIns="0" anchor="ctr">
-            <a:spAutoFit/>
-          </a:bodyPr>
-          <a:lstStyle/>
-          <a:p>
-            <a:pPr algn="l">
-              <a:lnSpc>
-                <a:spcPct val="100000"/>
-              </a:lnSpc>
-            </a:pPr>
-            <a:r>
-              <a:rPr sz="1150" b="1">
-                <a:solidFill>
-                  <a:srgbClr val="10293E"/>
-                </a:solidFill>
-                <a:latin typeface="Montserrat"/>
-              </a:rPr>
-              <a:t>Создаст систему на основе понимания бизнеса</a:t>
-            </a:r>
-          </a:p>
-        </p:txBody>
-      </p:sp>
-      <p:sp>
-        <p:nvSpPr>
-          <p:cNvPr id="16" name="Rounded Rectangle 15"/>
-          <p:cNvSpPr/>
-          <p:nvPr/>
-        </p:nvSpPr>
-        <p:spPr>
-          <a:xfrm>
-            <a:off x="420624" y="3483864"/>
-            <a:ext cx="4370832" cy="749808"/>
-          </a:xfrm>
-          <a:prstGeom prst="roundRect">
-            <a:avLst/>
-          </a:prstGeom>
-          <a:solidFill>
-            <a:srgbClr val="FFFFFF"/>
-          </a:solidFill>
-          <a:ln w="13970">
-            <a:solidFill>
-              <a:srgbClr val="D8E9F3"/>
-            </a:solidFill>
-          </a:ln>
-        </p:spPr>
-        <p:style>
-          <a:lnRef idx="1">
-            <a:schemeClr val="accent1"/>
-          </a:lnRef>
-          <a:fillRef idx="3">
-            <a:schemeClr val="accent1"/>
-          </a:fillRef>
-          <a:effectRef idx="2">
-            <a:schemeClr val="accent1"/>
-          </a:effectRef>
-          <a:fontRef idx="minor">
-            <a:schemeClr val="lt1"/>
-          </a:fontRef>
-        </p:style>
-        <p:txBody>
-          <a:bodyPr rtlCol="0" anchor="ctr"/>
-          <a:lstStyle/>
-          <a:p>
-            <a:pPr algn="ctr"/>
-          </a:p>
-        </p:txBody>
-      </p:sp>
-      <p:sp>
-        <p:nvSpPr>
-          <p:cNvPr id="17" name="Oval 16"/>
-          <p:cNvSpPr/>
-          <p:nvPr/>
-        </p:nvSpPr>
-        <p:spPr>
-          <a:xfrm>
-            <a:off x="557784" y="3602736"/>
-            <a:ext cx="512064" cy="512064"/>
-          </a:xfrm>
-          <a:prstGeom prst="ellipse">
-            <a:avLst/>
-          </a:prstGeom>
-          <a:solidFill>
-            <a:srgbClr val="2FC7F7"/>
-          </a:solidFill>
-          <a:ln>
-            <a:noFill/>
-          </a:ln>
-        </p:spPr>
-        <p:style>
-          <a:lnRef idx="1">
-            <a:schemeClr val="accent1"/>
-          </a:lnRef>
-          <a:fillRef idx="3">
-            <a:schemeClr val="accent1"/>
-          </a:fillRef>
-          <a:effectRef idx="2">
-            <a:schemeClr val="accent1"/>
-          </a:effectRef>
-          <a:fontRef idx="minor">
-            <a:schemeClr val="lt1"/>
-          </a:fontRef>
-        </p:style>
-        <p:txBody>
-          <a:bodyPr rtlCol="0" anchor="ctr"/>
-          <a:lstStyle/>
-          <a:p>
-            <a:pPr algn="ctr"/>
-          </a:p>
-        </p:txBody>
-      </p:sp>
-      <p:sp>
-        <p:nvSpPr>
-          <p:cNvPr id="18" name="TextBox 17"/>
-          <p:cNvSpPr txBox="1"/>
-          <p:nvPr/>
-        </p:nvSpPr>
-        <p:spPr>
-          <a:xfrm>
-            <a:off x="557784" y="3602736"/>
-            <a:ext cx="512064" cy="512064"/>
-          </a:xfrm>
-          <a:prstGeom prst="rect">
-            <a:avLst/>
-          </a:prstGeom>
-          <a:noFill/>
-        </p:spPr>
-        <p:txBody>
-          <a:bodyPr wrap="square" lIns="0" rIns="0" tIns="0" bIns="0" anchor="ctr">
-            <a:spAutoFit/>
-          </a:bodyPr>
-          <a:lstStyle/>
-          <a:p>
-            <a:pPr algn="ctr">
-              <a:lnSpc>
-                <a:spcPct val="100000"/>
-              </a:lnSpc>
-            </a:pPr>
-            <a:r>
-              <a:rPr sz="1000" b="1">
-                <a:solidFill>
-                  <a:srgbClr val="0066A1"/>
-                </a:solidFill>
-                <a:latin typeface="Montserrat"/>
-              </a:rPr>
-              <a:t>03</a:t>
-            </a:r>
-          </a:p>
-        </p:txBody>
-      </p:sp>
-      <p:sp>
-        <p:nvSpPr>
-          <p:cNvPr id="19" name="TextBox 18"/>
-          <p:cNvSpPr txBox="1"/>
-          <p:nvPr/>
-        </p:nvSpPr>
-        <p:spPr>
-          <a:xfrm>
-            <a:off x="1207008" y="3575304"/>
-            <a:ext cx="3438144" cy="566928"/>
-          </a:xfrm>
-          <a:prstGeom prst="rect">
-            <a:avLst/>
-          </a:prstGeom>
-          <a:noFill/>
-        </p:spPr>
-        <p:txBody>
-          <a:bodyPr wrap="square" lIns="0" rIns="0" tIns="0" bIns="0" anchor="ctr">
-            <a:spAutoFit/>
-          </a:bodyPr>
-          <a:lstStyle/>
-          <a:p>
-            <a:pPr algn="l">
-              <a:lnSpc>
-                <a:spcPct val="100000"/>
-              </a:lnSpc>
-            </a:pPr>
-            <a:r>
-              <a:rPr sz="1150" b="1">
-                <a:solidFill>
-                  <a:srgbClr val="10293E"/>
-                </a:solidFill>
-                <a:latin typeface="Montserrat"/>
-              </a:rPr>
-              <a:t>Обучит и поддержит</a:t>
-            </a:r>
-          </a:p>
-        </p:txBody>
-      </p:sp>
-      <p:sp>
-        <p:nvSpPr>
-          <p:cNvPr id="20" name="Rounded Rectangle 19"/>
-          <p:cNvSpPr/>
-          <p:nvPr/>
-        </p:nvSpPr>
-        <p:spPr>
-          <a:xfrm>
-            <a:off x="420624" y="4535424"/>
-            <a:ext cx="4370832" cy="3429000"/>
-          </a:xfrm>
-          <a:prstGeom prst="roundRect">
-            <a:avLst/>
-          </a:prstGeom>
-          <a:solidFill>
-            <a:srgbClr val="0066A1"/>
-          </a:solidFill>
-          <a:ln w="13970">
-            <a:solidFill>
-              <a:srgbClr val="0066A1"/>
-            </a:solidFill>
-          </a:ln>
-        </p:spPr>
-        <p:style>
-          <a:lnRef idx="1">
-            <a:schemeClr val="accent1"/>
-          </a:lnRef>
-          <a:fillRef idx="3">
-            <a:schemeClr val="accent1"/>
-          </a:fillRef>
-          <a:effectRef idx="2">
-            <a:schemeClr val="accent1"/>
-          </a:effectRef>
-          <a:fontRef idx="minor">
-            <a:schemeClr val="lt1"/>
-          </a:fontRef>
-        </p:style>
-        <p:txBody>
-          <a:bodyPr rtlCol="0" anchor="ctr"/>
-          <a:lstStyle/>
-          <a:p>
-            <a:pPr algn="ctr"/>
-          </a:p>
-        </p:txBody>
-      </p:sp>
-      <p:sp>
-        <p:nvSpPr>
-          <p:cNvPr id="21" name="TextBox 20"/>
-          <p:cNvSpPr txBox="1"/>
-          <p:nvPr/>
-        </p:nvSpPr>
-        <p:spPr>
-          <a:xfrm>
-            <a:off x="713232" y="4828032"/>
-            <a:ext cx="3785616" cy="384048"/>
-          </a:xfrm>
-          <a:prstGeom prst="rect">
-            <a:avLst/>
-          </a:prstGeom>
-          <a:noFill/>
-        </p:spPr>
-        <p:txBody>
-          <a:bodyPr wrap="square" lIns="0" rIns="0" tIns="0" bIns="0" anchor="t">
-            <a:spAutoFit/>
-          </a:bodyPr>
-          <a:lstStyle/>
-          <a:p>
-            <a:pPr algn="ctr">
-              <a:lnSpc>
-                <a:spcPct val="100000"/>
-              </a:lnSpc>
-            </a:pPr>
-            <a:r>
-              <a:rPr sz="1800" b="1">
-                <a:solidFill>
-                  <a:srgbClr val="FFFFFF"/>
-                </a:solidFill>
-                <a:latin typeface="Montserrat"/>
-              </a:rPr>
-              <a:t>Пишите мне в ВК</a:t>
-            </a:r>
-          </a:p>
-        </p:txBody>
-      </p:sp>
-      <p:sp>
-        <p:nvSpPr>
-          <p:cNvPr id="22" name="TextBox 21"/>
-          <p:cNvSpPr txBox="1"/>
-          <p:nvPr/>
-        </p:nvSpPr>
-        <p:spPr>
-          <a:xfrm>
-            <a:off x="713232" y="5285232"/>
-            <a:ext cx="3785616" cy="1024128"/>
-          </a:xfrm>
-          <a:prstGeom prst="rect">
-            <a:avLst/>
-          </a:prstGeom>
-          <a:noFill/>
-        </p:spPr>
-        <p:txBody>
-          <a:bodyPr wrap="square" lIns="0" rIns="0" tIns="0" bIns="0" anchor="t">
-            <a:spAutoFit/>
-          </a:bodyPr>
-          <a:lstStyle/>
-          <a:p>
-            <a:pPr algn="ctr">
-              <a:lnSpc>
-                <a:spcPct val="95000"/>
-              </a:lnSpc>
-            </a:pPr>
-            <a:r>
-              <a:rPr sz="1150" b="0">
-                <a:solidFill>
-                  <a:srgbClr val="FFFFFF"/>
-                </a:solidFill>
-                <a:latin typeface="Open Sans"/>
-              </a:rPr>
-              <a:t>и получите чек-лист
-«10 ошибок внедрения Битрикс24.
-Как их избежать»</a:t>
-            </a:r>
-          </a:p>
-        </p:txBody>
-      </p:sp>
       <p:pic>
         <p:nvPicPr>
-          <p:cNvPr id="23" name="Picture 22" descr="vk-anchebykin-qr.png">
-            <a:hlinkClick r:id="rId3"/>
-          </p:cNvPr>
+          <p:cNvPr id="5" name="Picture 4" descr="russkiy-bit-logo.png"/>
           <p:cNvPicPr>
             <a:picLocks noChangeAspect="1"/>
           </p:cNvPicPr>
@@ -5794,6 +4944,694 @@
         </p:blipFill>
         <p:spPr>
           <a:xfrm>
+            <a:off x="3543300" y="256032"/>
+            <a:ext cx="1234440" cy="298767"/>
+          </a:xfrm>
+          <a:prstGeom prst="rect">
+            <a:avLst/>
+          </a:prstGeom>
+        </p:spPr>
+      </p:pic>
+      <p:sp>
+        <p:nvSpPr>
+          <p:cNvPr id="6" name="TextBox 5"/>
+          <p:cNvSpPr txBox="1"/>
+          <p:nvPr/>
+        </p:nvSpPr>
+        <p:spPr>
+          <a:xfrm>
+            <a:off x="475488" y="502920"/>
+            <a:ext cx="2884932" cy="1051560"/>
+          </a:xfrm>
+          <a:prstGeom prst="rect">
+            <a:avLst/>
+          </a:prstGeom>
+          <a:noFill/>
+        </p:spPr>
+        <p:txBody>
+          <a:bodyPr wrap="square" lIns="0" rIns="0" tIns="0" bIns="0" anchor="t">
+            <a:spAutoFit/>
+          </a:bodyPr>
+          <a:lstStyle/>
+          <a:p>
+            <a:pPr algn="l">
+              <a:lnSpc>
+                <a:spcPct val="90000"/>
+              </a:lnSpc>
+            </a:pPr>
+            <a:r>
+              <a:rPr sz="2150" b="1">
+                <a:solidFill>
+                  <a:srgbClr val="10293E"/>
+                </a:solidFill>
+                <a:latin typeface="Montserrat"/>
+              </a:rPr>
+              <a:t>Вывод: нужен честный грамотный партнёр</a:t>
+            </a:r>
+          </a:p>
+        </p:txBody>
+      </p:sp>
+      <p:sp>
+        <p:nvSpPr>
+          <p:cNvPr id="7" name="Rounded Rectangle 6"/>
+          <p:cNvSpPr/>
+          <p:nvPr/>
+        </p:nvSpPr>
+        <p:spPr>
+          <a:xfrm>
+            <a:off x="420624" y="1655064"/>
+            <a:ext cx="4370832" cy="749808"/>
+          </a:xfrm>
+          <a:prstGeom prst="roundRect">
+            <a:avLst/>
+          </a:prstGeom>
+          <a:solidFill>
+            <a:srgbClr val="FFFFFF"/>
+          </a:solidFill>
+          <a:ln w="13970">
+            <a:solidFill>
+              <a:srgbClr val="D8E9F3"/>
+            </a:solidFill>
+          </a:ln>
+        </p:spPr>
+        <p:style>
+          <a:lnRef idx="1">
+            <a:schemeClr val="accent1"/>
+          </a:lnRef>
+          <a:fillRef idx="3">
+            <a:schemeClr val="accent1"/>
+          </a:fillRef>
+          <a:effectRef idx="2">
+            <a:schemeClr val="accent1"/>
+          </a:effectRef>
+          <a:fontRef idx="minor">
+            <a:schemeClr val="lt1"/>
+          </a:fontRef>
+        </p:style>
+        <p:txBody>
+          <a:bodyPr rtlCol="0" anchor="ctr"/>
+          <a:lstStyle/>
+          <a:p>
+            <a:pPr algn="ctr"/>
+          </a:p>
+        </p:txBody>
+      </p:sp>
+      <p:sp>
+        <p:nvSpPr>
+          <p:cNvPr id="8" name="Oval 7"/>
+          <p:cNvSpPr/>
+          <p:nvPr/>
+        </p:nvSpPr>
+        <p:spPr>
+          <a:xfrm>
+            <a:off x="557784" y="1773936"/>
+            <a:ext cx="512064" cy="512064"/>
+          </a:xfrm>
+          <a:prstGeom prst="ellipse">
+            <a:avLst/>
+          </a:prstGeom>
+          <a:solidFill>
+            <a:srgbClr val="2FC7F7"/>
+          </a:solidFill>
+          <a:ln>
+            <a:noFill/>
+          </a:ln>
+        </p:spPr>
+        <p:style>
+          <a:lnRef idx="1">
+            <a:schemeClr val="accent1"/>
+          </a:lnRef>
+          <a:fillRef idx="3">
+            <a:schemeClr val="accent1"/>
+          </a:fillRef>
+          <a:effectRef idx="2">
+            <a:schemeClr val="accent1"/>
+          </a:effectRef>
+          <a:fontRef idx="minor">
+            <a:schemeClr val="lt1"/>
+          </a:fontRef>
+        </p:style>
+        <p:txBody>
+          <a:bodyPr rtlCol="0" anchor="ctr"/>
+          <a:lstStyle/>
+          <a:p>
+            <a:pPr algn="ctr"/>
+          </a:p>
+        </p:txBody>
+      </p:sp>
+      <p:sp>
+        <p:nvSpPr>
+          <p:cNvPr id="9" name="TextBox 8"/>
+          <p:cNvSpPr txBox="1"/>
+          <p:nvPr/>
+        </p:nvSpPr>
+        <p:spPr>
+          <a:xfrm>
+            <a:off x="557784" y="1773936"/>
+            <a:ext cx="512064" cy="512064"/>
+          </a:xfrm>
+          <a:prstGeom prst="rect">
+            <a:avLst/>
+          </a:prstGeom>
+          <a:noFill/>
+        </p:spPr>
+        <p:txBody>
+          <a:bodyPr wrap="square" lIns="0" rIns="0" tIns="0" bIns="0" anchor="ctr">
+            <a:spAutoFit/>
+          </a:bodyPr>
+          <a:lstStyle/>
+          <a:p>
+            <a:pPr algn="ctr">
+              <a:lnSpc>
+                <a:spcPct val="100000"/>
+              </a:lnSpc>
+            </a:pPr>
+            <a:r>
+              <a:rPr sz="1000" b="1">
+                <a:solidFill>
+                  <a:srgbClr val="0066A1"/>
+                </a:solidFill>
+                <a:latin typeface="Montserrat"/>
+              </a:rPr>
+              <a:t>01</a:t>
+            </a:r>
+          </a:p>
+        </p:txBody>
+      </p:sp>
+      <p:sp>
+        <p:nvSpPr>
+          <p:cNvPr id="10" name="TextBox 9"/>
+          <p:cNvSpPr txBox="1"/>
+          <p:nvPr/>
+        </p:nvSpPr>
+        <p:spPr>
+          <a:xfrm>
+            <a:off x="1207008" y="1746504"/>
+            <a:ext cx="3438144" cy="566928"/>
+          </a:xfrm>
+          <a:prstGeom prst="rect">
+            <a:avLst/>
+          </a:prstGeom>
+          <a:noFill/>
+        </p:spPr>
+        <p:txBody>
+          <a:bodyPr wrap="square" lIns="0" rIns="0" tIns="0" bIns="0" anchor="ctr">
+            <a:spAutoFit/>
+          </a:bodyPr>
+          <a:lstStyle/>
+          <a:p>
+            <a:pPr algn="l">
+              <a:lnSpc>
+                <a:spcPct val="100000"/>
+              </a:lnSpc>
+            </a:pPr>
+            <a:r>
+              <a:rPr sz="1150" b="1">
+                <a:solidFill>
+                  <a:srgbClr val="10293E"/>
+                </a:solidFill>
+                <a:latin typeface="Montserrat"/>
+              </a:rPr>
+              <a:t>Говорит на одном языке с вами и клиентом</a:t>
+            </a:r>
+          </a:p>
+        </p:txBody>
+      </p:sp>
+      <p:sp>
+        <p:nvSpPr>
+          <p:cNvPr id="11" name="Rounded Rectangle 10"/>
+          <p:cNvSpPr/>
+          <p:nvPr/>
+        </p:nvSpPr>
+        <p:spPr>
+          <a:xfrm>
+            <a:off x="420624" y="2569464"/>
+            <a:ext cx="4370832" cy="749808"/>
+          </a:xfrm>
+          <a:prstGeom prst="roundRect">
+            <a:avLst/>
+          </a:prstGeom>
+          <a:solidFill>
+            <a:srgbClr val="FFFFFF"/>
+          </a:solidFill>
+          <a:ln w="13970">
+            <a:solidFill>
+              <a:srgbClr val="D8E9F3"/>
+            </a:solidFill>
+          </a:ln>
+        </p:spPr>
+        <p:style>
+          <a:lnRef idx="1">
+            <a:schemeClr val="accent1"/>
+          </a:lnRef>
+          <a:fillRef idx="3">
+            <a:schemeClr val="accent1"/>
+          </a:fillRef>
+          <a:effectRef idx="2">
+            <a:schemeClr val="accent1"/>
+          </a:effectRef>
+          <a:fontRef idx="minor">
+            <a:schemeClr val="lt1"/>
+          </a:fontRef>
+        </p:style>
+        <p:txBody>
+          <a:bodyPr rtlCol="0" anchor="ctr"/>
+          <a:lstStyle/>
+          <a:p>
+            <a:pPr algn="ctr"/>
+          </a:p>
+        </p:txBody>
+      </p:sp>
+      <p:sp>
+        <p:nvSpPr>
+          <p:cNvPr id="12" name="Oval 11"/>
+          <p:cNvSpPr/>
+          <p:nvPr/>
+        </p:nvSpPr>
+        <p:spPr>
+          <a:xfrm>
+            <a:off x="557784" y="2688336"/>
+            <a:ext cx="512064" cy="512064"/>
+          </a:xfrm>
+          <a:prstGeom prst="ellipse">
+            <a:avLst/>
+          </a:prstGeom>
+          <a:solidFill>
+            <a:srgbClr val="2FC7F7"/>
+          </a:solidFill>
+          <a:ln>
+            <a:noFill/>
+          </a:ln>
+        </p:spPr>
+        <p:style>
+          <a:lnRef idx="1">
+            <a:schemeClr val="accent1"/>
+          </a:lnRef>
+          <a:fillRef idx="3">
+            <a:schemeClr val="accent1"/>
+          </a:fillRef>
+          <a:effectRef idx="2">
+            <a:schemeClr val="accent1"/>
+          </a:effectRef>
+          <a:fontRef idx="minor">
+            <a:schemeClr val="lt1"/>
+          </a:fontRef>
+        </p:style>
+        <p:txBody>
+          <a:bodyPr rtlCol="0" anchor="ctr"/>
+          <a:lstStyle/>
+          <a:p>
+            <a:pPr algn="ctr"/>
+          </a:p>
+        </p:txBody>
+      </p:sp>
+      <p:sp>
+        <p:nvSpPr>
+          <p:cNvPr id="13" name="TextBox 12"/>
+          <p:cNvSpPr txBox="1"/>
+          <p:nvPr/>
+        </p:nvSpPr>
+        <p:spPr>
+          <a:xfrm>
+            <a:off x="557784" y="2688336"/>
+            <a:ext cx="512064" cy="512064"/>
+          </a:xfrm>
+          <a:prstGeom prst="rect">
+            <a:avLst/>
+          </a:prstGeom>
+          <a:noFill/>
+        </p:spPr>
+        <p:txBody>
+          <a:bodyPr wrap="square" lIns="0" rIns="0" tIns="0" bIns="0" anchor="ctr">
+            <a:spAutoFit/>
+          </a:bodyPr>
+          <a:lstStyle/>
+          <a:p>
+            <a:pPr algn="ctr">
+              <a:lnSpc>
+                <a:spcPct val="100000"/>
+              </a:lnSpc>
+            </a:pPr>
+            <a:r>
+              <a:rPr sz="1000" b="1">
+                <a:solidFill>
+                  <a:srgbClr val="0066A1"/>
+                </a:solidFill>
+                <a:latin typeface="Montserrat"/>
+              </a:rPr>
+              <a:t>02</a:t>
+            </a:r>
+          </a:p>
+        </p:txBody>
+      </p:sp>
+      <p:sp>
+        <p:nvSpPr>
+          <p:cNvPr id="14" name="TextBox 13"/>
+          <p:cNvSpPr txBox="1"/>
+          <p:nvPr/>
+        </p:nvSpPr>
+        <p:spPr>
+          <a:xfrm>
+            <a:off x="1207008" y="2660904"/>
+            <a:ext cx="3438144" cy="566928"/>
+          </a:xfrm>
+          <a:prstGeom prst="rect">
+            <a:avLst/>
+          </a:prstGeom>
+          <a:noFill/>
+        </p:spPr>
+        <p:txBody>
+          <a:bodyPr wrap="square" lIns="0" rIns="0" tIns="0" bIns="0" anchor="ctr">
+            <a:spAutoFit/>
+          </a:bodyPr>
+          <a:lstStyle/>
+          <a:p>
+            <a:pPr algn="l">
+              <a:lnSpc>
+                <a:spcPct val="100000"/>
+              </a:lnSpc>
+            </a:pPr>
+            <a:r>
+              <a:rPr sz="1150" b="1">
+                <a:solidFill>
+                  <a:srgbClr val="10293E"/>
+                </a:solidFill>
+                <a:latin typeface="Montserrat"/>
+              </a:rPr>
+              <a:t>Создаст систему на основе понимания бизнеса</a:t>
+            </a:r>
+          </a:p>
+        </p:txBody>
+      </p:sp>
+      <p:sp>
+        <p:nvSpPr>
+          <p:cNvPr id="15" name="Rounded Rectangle 14"/>
+          <p:cNvSpPr/>
+          <p:nvPr/>
+        </p:nvSpPr>
+        <p:spPr>
+          <a:xfrm>
+            <a:off x="420624" y="3483864"/>
+            <a:ext cx="4370832" cy="749808"/>
+          </a:xfrm>
+          <a:prstGeom prst="roundRect">
+            <a:avLst/>
+          </a:prstGeom>
+          <a:solidFill>
+            <a:srgbClr val="FFFFFF"/>
+          </a:solidFill>
+          <a:ln w="13970">
+            <a:solidFill>
+              <a:srgbClr val="D8E9F3"/>
+            </a:solidFill>
+          </a:ln>
+        </p:spPr>
+        <p:style>
+          <a:lnRef idx="1">
+            <a:schemeClr val="accent1"/>
+          </a:lnRef>
+          <a:fillRef idx="3">
+            <a:schemeClr val="accent1"/>
+          </a:fillRef>
+          <a:effectRef idx="2">
+            <a:schemeClr val="accent1"/>
+          </a:effectRef>
+          <a:fontRef idx="minor">
+            <a:schemeClr val="lt1"/>
+          </a:fontRef>
+        </p:style>
+        <p:txBody>
+          <a:bodyPr rtlCol="0" anchor="ctr"/>
+          <a:lstStyle/>
+          <a:p>
+            <a:pPr algn="ctr"/>
+          </a:p>
+        </p:txBody>
+      </p:sp>
+      <p:sp>
+        <p:nvSpPr>
+          <p:cNvPr id="16" name="Oval 15"/>
+          <p:cNvSpPr/>
+          <p:nvPr/>
+        </p:nvSpPr>
+        <p:spPr>
+          <a:xfrm>
+            <a:off x="557784" y="3602736"/>
+            <a:ext cx="512064" cy="512064"/>
+          </a:xfrm>
+          <a:prstGeom prst="ellipse">
+            <a:avLst/>
+          </a:prstGeom>
+          <a:solidFill>
+            <a:srgbClr val="2FC7F7"/>
+          </a:solidFill>
+          <a:ln>
+            <a:noFill/>
+          </a:ln>
+        </p:spPr>
+        <p:style>
+          <a:lnRef idx="1">
+            <a:schemeClr val="accent1"/>
+          </a:lnRef>
+          <a:fillRef idx="3">
+            <a:schemeClr val="accent1"/>
+          </a:fillRef>
+          <a:effectRef idx="2">
+            <a:schemeClr val="accent1"/>
+          </a:effectRef>
+          <a:fontRef idx="minor">
+            <a:schemeClr val="lt1"/>
+          </a:fontRef>
+        </p:style>
+        <p:txBody>
+          <a:bodyPr rtlCol="0" anchor="ctr"/>
+          <a:lstStyle/>
+          <a:p>
+            <a:pPr algn="ctr"/>
+          </a:p>
+        </p:txBody>
+      </p:sp>
+      <p:sp>
+        <p:nvSpPr>
+          <p:cNvPr id="17" name="TextBox 16"/>
+          <p:cNvSpPr txBox="1"/>
+          <p:nvPr/>
+        </p:nvSpPr>
+        <p:spPr>
+          <a:xfrm>
+            <a:off x="557784" y="3602736"/>
+            <a:ext cx="512064" cy="512064"/>
+          </a:xfrm>
+          <a:prstGeom prst="rect">
+            <a:avLst/>
+          </a:prstGeom>
+          <a:noFill/>
+        </p:spPr>
+        <p:txBody>
+          <a:bodyPr wrap="square" lIns="0" rIns="0" tIns="0" bIns="0" anchor="ctr">
+            <a:spAutoFit/>
+          </a:bodyPr>
+          <a:lstStyle/>
+          <a:p>
+            <a:pPr algn="ctr">
+              <a:lnSpc>
+                <a:spcPct val="100000"/>
+              </a:lnSpc>
+            </a:pPr>
+            <a:r>
+              <a:rPr sz="1000" b="1">
+                <a:solidFill>
+                  <a:srgbClr val="0066A1"/>
+                </a:solidFill>
+                <a:latin typeface="Montserrat"/>
+              </a:rPr>
+              <a:t>03</a:t>
+            </a:r>
+          </a:p>
+        </p:txBody>
+      </p:sp>
+      <p:sp>
+        <p:nvSpPr>
+          <p:cNvPr id="18" name="TextBox 17"/>
+          <p:cNvSpPr txBox="1"/>
+          <p:nvPr/>
+        </p:nvSpPr>
+        <p:spPr>
+          <a:xfrm>
+            <a:off x="1207008" y="3575304"/>
+            <a:ext cx="3438144" cy="566928"/>
+          </a:xfrm>
+          <a:prstGeom prst="rect">
+            <a:avLst/>
+          </a:prstGeom>
+          <a:noFill/>
+        </p:spPr>
+        <p:txBody>
+          <a:bodyPr wrap="square" lIns="0" rIns="0" tIns="0" bIns="0" anchor="ctr">
+            <a:spAutoFit/>
+          </a:bodyPr>
+          <a:lstStyle/>
+          <a:p>
+            <a:pPr algn="l">
+              <a:lnSpc>
+                <a:spcPct val="100000"/>
+              </a:lnSpc>
+            </a:pPr>
+            <a:r>
+              <a:rPr sz="1150" b="1">
+                <a:solidFill>
+                  <a:srgbClr val="10293E"/>
+                </a:solidFill>
+                <a:latin typeface="Montserrat"/>
+              </a:rPr>
+              <a:t>Обучит и поддержит</a:t>
+            </a:r>
+          </a:p>
+        </p:txBody>
+      </p:sp>
+      <p:sp>
+        <p:nvSpPr>
+          <p:cNvPr id="19" name="Rounded Rectangle 18"/>
+          <p:cNvSpPr/>
+          <p:nvPr/>
+        </p:nvSpPr>
+        <p:spPr>
+          <a:xfrm>
+            <a:off x="420624" y="4535424"/>
+            <a:ext cx="4370832" cy="3429000"/>
+          </a:xfrm>
+          <a:prstGeom prst="roundRect">
+            <a:avLst/>
+          </a:prstGeom>
+          <a:solidFill>
+            <a:srgbClr val="0066A1"/>
+          </a:solidFill>
+          <a:ln w="13970">
+            <a:solidFill>
+              <a:srgbClr val="0066A1"/>
+            </a:solidFill>
+          </a:ln>
+        </p:spPr>
+        <p:style>
+          <a:lnRef idx="1">
+            <a:schemeClr val="accent1"/>
+          </a:lnRef>
+          <a:fillRef idx="3">
+            <a:schemeClr val="accent1"/>
+          </a:fillRef>
+          <a:effectRef idx="2">
+            <a:schemeClr val="accent1"/>
+          </a:effectRef>
+          <a:fontRef idx="minor">
+            <a:schemeClr val="lt1"/>
+          </a:fontRef>
+        </p:style>
+        <p:txBody>
+          <a:bodyPr rtlCol="0" anchor="ctr"/>
+          <a:lstStyle/>
+          <a:p>
+            <a:pPr algn="ctr"/>
+          </a:p>
+        </p:txBody>
+      </p:sp>
+      <p:sp>
+        <p:nvSpPr>
+          <p:cNvPr id="20" name="TextBox 19"/>
+          <p:cNvSpPr txBox="1"/>
+          <p:nvPr/>
+        </p:nvSpPr>
+        <p:spPr>
+          <a:xfrm>
+            <a:off x="713232" y="4828032"/>
+            <a:ext cx="3785616" cy="384048"/>
+          </a:xfrm>
+          <a:prstGeom prst="rect">
+            <a:avLst/>
+          </a:prstGeom>
+          <a:noFill/>
+        </p:spPr>
+        <p:txBody>
+          <a:bodyPr wrap="square" lIns="0" rIns="0" tIns="0" bIns="0" anchor="t">
+            <a:spAutoFit/>
+          </a:bodyPr>
+          <a:lstStyle/>
+          <a:p>
+            <a:pPr algn="ctr">
+              <a:lnSpc>
+                <a:spcPct val="100000"/>
+              </a:lnSpc>
+            </a:pPr>
+            <a:r>
+              <a:rPr sz="1800" b="1">
+                <a:solidFill>
+                  <a:srgbClr val="FFFFFF"/>
+                </a:solidFill>
+                <a:latin typeface="Montserrat"/>
+              </a:rPr>
+              <a:t>Пишите мне в ВК</a:t>
+            </a:r>
+          </a:p>
+        </p:txBody>
+      </p:sp>
+      <p:sp>
+        <p:nvSpPr>
+          <p:cNvPr id="21" name="TextBox 20"/>
+          <p:cNvSpPr txBox="1"/>
+          <p:nvPr/>
+        </p:nvSpPr>
+        <p:spPr>
+          <a:xfrm>
+            <a:off x="713232" y="5285232"/>
+            <a:ext cx="3785616" cy="1024128"/>
+          </a:xfrm>
+          <a:prstGeom prst="rect">
+            <a:avLst/>
+          </a:prstGeom>
+          <a:noFill/>
+        </p:spPr>
+        <p:txBody>
+          <a:bodyPr wrap="square" lIns="0" rIns="0" tIns="0" bIns="0" anchor="t">
+            <a:spAutoFit/>
+          </a:bodyPr>
+          <a:lstStyle/>
+          <a:p>
+            <a:pPr algn="ctr">
+              <a:lnSpc>
+                <a:spcPct val="95000"/>
+              </a:lnSpc>
+            </a:pPr>
+            <a:r>
+              <a:rPr sz="1150" b="0">
+                <a:solidFill>
+                  <a:srgbClr val="FFFFFF"/>
+                </a:solidFill>
+                <a:latin typeface="Open Sans"/>
+              </a:rPr>
+              <a:t>и получите чек-лист
+«10 ошибок внедрения Битрикс24.
+Как их избежать»</a:t>
+            </a:r>
+          </a:p>
+        </p:txBody>
+      </p:sp>
+      <p:pic>
+        <p:nvPicPr>
+          <p:cNvPr id="22" name="Picture 21" descr="vk-anchebykin-qr.png">
+            <a:hlinkClick r:id="rId4"/>
+          </p:cNvPr>
+          <p:cNvPicPr>
+            <a:picLocks noChangeAspect="1"/>
+          </p:cNvPicPr>
+          <p:nvPr/>
+        </p:nvPicPr>
+        <p:blipFill>
+          <a:blip r:embed="rId3"/>
+          <a:stretch>
+            <a:fillRect/>
+          </a:stretch>
+        </p:blipFill>
+        <p:spPr>
+          <a:xfrm>
             <a:off x="1938528" y="6345936"/>
             <a:ext cx="1335024" cy="1335024"/>
           </a:xfrm>
@@ -5804,7 +5642,7 @@
       </p:pic>
       <p:sp>
         <p:nvSpPr>
-          <p:cNvPr id="24" name="TextBox 23"/>
+          <p:cNvPr id="23" name="TextBox 22"/>
           <p:cNvSpPr txBox="1"/>
           <p:nvPr/>
         </p:nvSpPr>
